--- a/docs/reports/project-status-2026-07-20.pptx
+++ b/docs/reports/project-status-2026-07-20.pptx
@@ -4183,7 +4183,7 @@
         <p:spPr>
           <a:xfrm>
             <a:off x="658368" y="1078992"/>
-            <a:ext cx="7726680" cy="987552"/>
+            <a:ext cx="7973568" cy="749808"/>
           </a:xfrm>
           <a:prstGeom prst="rect">
             <a:avLst/>
@@ -4201,7 +4201,7 @@
               <a:buNone/>
             </a:pPr>
             <a:r>
-              <a:rPr lang="en-US" sz="4200" b="1" dirty="0">
+              <a:rPr lang="en-US" sz="3800" b="1" dirty="0">
                 <a:solidFill>
                   <a:srgbClr val="FFFFFF"/>
                 </a:solidFill>
@@ -4211,7 +4211,7 @@
               </a:rPr>
               <a:t>平台能力已成形，下一阶段是工程化收口</a:t>
             </a:r>
-            <a:endParaRPr lang="en-US" sz="4200" dirty="0"/>
+            <a:endParaRPr lang="en-US" sz="3800" dirty="0"/>
           </a:p>
         </p:txBody>
       </p:sp>
@@ -5532,7 +5532,7 @@
               <a:buNone/>
             </a:pPr>
             <a:r>
-              <a:rPr lang="en-US" sz="2800" b="1" dirty="0">
+              <a:rPr lang="en-US" sz="2400" b="1" dirty="0">
                 <a:solidFill>
                   <a:srgbClr val="065A82"/>
                 </a:solidFill>
@@ -5542,7 +5542,7 @@
               </a:rPr>
               <a:t>2025-08-26</a:t>
             </a:r>
-            <a:endParaRPr lang="en-US" sz="2800" dirty="0"/>
+            <a:endParaRPr lang="en-US" sz="2400" dirty="0"/>
           </a:p>
         </p:txBody>
       </p:sp>
@@ -7239,8 +7239,8 @@
         </p:nvSpPr>
         <p:spPr>
           <a:xfrm>
-            <a:off x="1700784" y="5157216"/>
-            <a:ext cx="1673352" cy="274320"/>
+            <a:off x="1700784" y="5065776"/>
+            <a:ext cx="1673352" cy="457200"/>
           </a:xfrm>
           <a:prstGeom prst="rect">
             <a:avLst/>
@@ -7258,7 +7258,7 @@
               <a:buNone/>
             </a:pPr>
             <a:r>
-              <a:rPr lang="en-US" sz="1150" b="1" dirty="0">
+              <a:rPr lang="en-US" sz="1050" b="1" dirty="0">
                 <a:solidFill>
                   <a:srgbClr val="173B47"/>
                 </a:solidFill>
@@ -7266,9 +7266,26 @@
                 <a:ea typeface="Noto Sans CJK SC" pitchFamily="34" charset="-122"/>
                 <a:cs typeface="Noto Sans CJK SC" pitchFamily="34" charset="-120"/>
               </a:rPr>
-              <a:t>MySQL · Redis · Caffeine</a:t>
-            </a:r>
-            <a:endParaRPr lang="en-US" sz="1150" dirty="0"/>
+              <a:t>MySQL · Redis</a:t>
+            </a:r>
+            <a:endParaRPr lang="en-US" sz="1050" dirty="0"/>
+          </a:p>
+          <a:p>
+            <a:pPr indent="0" marL="0">
+              <a:buNone/>
+            </a:pPr>
+            <a:r>
+              <a:rPr lang="en-US" sz="1050" b="1" dirty="0">
+                <a:solidFill>
+                  <a:srgbClr val="173B47"/>
+                </a:solidFill>
+                <a:latin typeface="Noto Sans CJK SC" pitchFamily="34" charset="0"/>
+                <a:ea typeface="Noto Sans CJK SC" pitchFamily="34" charset="-122"/>
+                <a:cs typeface="Noto Sans CJK SC" pitchFamily="34" charset="-120"/>
+              </a:rPr>
+              <a:t>Caffeine</a:t>
+            </a:r>
+            <a:endParaRPr lang="en-US" sz="1050" dirty="0"/>
           </a:p>
         </p:txBody>
       </p:sp>
@@ -7348,8 +7365,8 @@
         </p:nvSpPr>
         <p:spPr>
           <a:xfrm>
-            <a:off x="4389120" y="5157216"/>
-            <a:ext cx="1673352" cy="274320"/>
+            <a:off x="4389120" y="5065776"/>
+            <a:ext cx="1673352" cy="457200"/>
           </a:xfrm>
           <a:prstGeom prst="rect">
             <a:avLst/>
@@ -7367,7 +7384,7 @@
               <a:buNone/>
             </a:pPr>
             <a:r>
-              <a:rPr lang="en-US" sz="1150" b="1" dirty="0">
+              <a:rPr lang="en-US" sz="1050" b="1" dirty="0">
                 <a:solidFill>
                   <a:srgbClr val="173B47"/>
                 </a:solidFill>
@@ -7375,9 +7392,26 @@
                 <a:ea typeface="Noto Sans CJK SC" pitchFamily="34" charset="-122"/>
                 <a:cs typeface="Noto Sans CJK SC" pitchFamily="34" charset="-120"/>
               </a:rPr>
-              <a:t>DeepSeek · DashScope</a:t>
-            </a:r>
-            <a:endParaRPr lang="en-US" sz="1150" dirty="0"/>
+              <a:t>DeepSeek</a:t>
+            </a:r>
+            <a:endParaRPr lang="en-US" sz="1050" dirty="0"/>
+          </a:p>
+          <a:p>
+            <a:pPr indent="0" marL="0">
+              <a:buNone/>
+            </a:pPr>
+            <a:r>
+              <a:rPr lang="en-US" sz="1050" b="1" dirty="0">
+                <a:solidFill>
+                  <a:srgbClr val="173B47"/>
+                </a:solidFill>
+                <a:latin typeface="Noto Sans CJK SC" pitchFamily="34" charset="0"/>
+                <a:ea typeface="Noto Sans CJK SC" pitchFamily="34" charset="-122"/>
+                <a:cs typeface="Noto Sans CJK SC" pitchFamily="34" charset="-120"/>
+              </a:rPr>
+              <a:t>DashScope</a:t>
+            </a:r>
+            <a:endParaRPr lang="en-US" sz="1050" dirty="0"/>
           </a:p>
         </p:txBody>
       </p:sp>
@@ -7457,8 +7491,8 @@
         </p:nvSpPr>
         <p:spPr>
           <a:xfrm>
-            <a:off x="7077456" y="5157216"/>
-            <a:ext cx="1673352" cy="274320"/>
+            <a:off x="7077456" y="5065776"/>
+            <a:ext cx="1673352" cy="457200"/>
           </a:xfrm>
           <a:prstGeom prst="rect">
             <a:avLst/>
@@ -7476,7 +7510,7 @@
               <a:buNone/>
             </a:pPr>
             <a:r>
-              <a:rPr lang="en-US" sz="1150" b="1" dirty="0">
+              <a:rPr lang="en-US" sz="1050" b="1" dirty="0">
                 <a:solidFill>
                   <a:srgbClr val="173B47"/>
                 </a:solidFill>
@@ -7484,9 +7518,26 @@
                 <a:ea typeface="Noto Sans CJK SC" pitchFamily="34" charset="-122"/>
                 <a:cs typeface="Noto Sans CJK SC" pitchFamily="34" charset="-120"/>
               </a:rPr>
-              <a:t>COS · Selenium · Chrome</a:t>
-            </a:r>
-            <a:endParaRPr lang="en-US" sz="1150" dirty="0"/>
+              <a:t>COS · Selenium</a:t>
+            </a:r>
+            <a:endParaRPr lang="en-US" sz="1050" dirty="0"/>
+          </a:p>
+          <a:p>
+            <a:pPr indent="0" marL="0">
+              <a:buNone/>
+            </a:pPr>
+            <a:r>
+              <a:rPr lang="en-US" sz="1050" b="1" dirty="0">
+                <a:solidFill>
+                  <a:srgbClr val="173B47"/>
+                </a:solidFill>
+                <a:latin typeface="Noto Sans CJK SC" pitchFamily="34" charset="0"/>
+                <a:ea typeface="Noto Sans CJK SC" pitchFamily="34" charset="-122"/>
+                <a:cs typeface="Noto Sans CJK SC" pitchFamily="34" charset="-120"/>
+              </a:rPr>
+              <a:t>Chrome</a:t>
+            </a:r>
+            <a:endParaRPr lang="en-US" sz="1050" dirty="0"/>
           </a:p>
         </p:txBody>
       </p:sp>
@@ -7566,8 +7617,8 @@
         </p:nvSpPr>
         <p:spPr>
           <a:xfrm>
-            <a:off x="9765792" y="5157216"/>
-            <a:ext cx="1673352" cy="274320"/>
+            <a:off x="9765792" y="5065776"/>
+            <a:ext cx="1673352" cy="457200"/>
           </a:xfrm>
           <a:prstGeom prst="rect">
             <a:avLst/>
@@ -7585,7 +7636,7 @@
               <a:buNone/>
             </a:pPr>
             <a:r>
-              <a:rPr lang="en-US" sz="1150" b="1" dirty="0">
+              <a:rPr lang="en-US" sz="1050" b="1" dirty="0">
                 <a:solidFill>
                   <a:srgbClr val="173B47"/>
                 </a:solidFill>
@@ -7595,7 +7646,7 @@
               </a:rPr>
               <a:t>Prometheus · Grafana</a:t>
             </a:r>
-            <a:endParaRPr lang="en-US" sz="1150" dirty="0"/>
+            <a:endParaRPr lang="en-US" sz="1050" dirty="0"/>
           </a:p>
         </p:txBody>
       </p:sp>
@@ -10410,45 +10461,6 @@
         </p:nvSpPr>
         <p:spPr>
           <a:xfrm>
-            <a:off x="2221992" y="2185416"/>
-            <a:ext cx="411480" cy="182880"/>
-          </a:xfrm>
-          <a:prstGeom prst="rect">
-            <a:avLst/>
-          </a:prstGeom>
-          <a:noFill/>
-          <a:ln/>
-        </p:spPr>
-        <p:txBody>
-          <a:bodyPr wrap="square" lIns="0" tIns="0" rIns="0" bIns="0" rtlCol="0" anchor="ctr"/>
-          <a:lstStyle/>
-          <a:p>
-            <a:pPr indent="0" marL="0">
-              <a:buNone/>
-            </a:pPr>
-            <a:r>
-              <a:rPr lang="en-US" sz="1100" dirty="0">
-                <a:solidFill>
-                  <a:srgbClr val="78919A"/>
-                </a:solidFill>
-                <a:latin typeface="Noto Sans CJK SC" pitchFamily="34" charset="0"/>
-                <a:ea typeface="Noto Sans CJK SC" pitchFamily="34" charset="-122"/>
-                <a:cs typeface="Noto Sans CJK SC" pitchFamily="34" charset="-120"/>
-              </a:rPr>
-              <a:t>个</a:t>
-            </a:r>
-            <a:endParaRPr lang="en-US" sz="1100" dirty="0"/>
-          </a:p>
-        </p:txBody>
-      </p:sp>
-      <p:sp>
-        <p:nvSpPr>
-          <p:cNvPr id="11" name="Text 9"/>
-          <p:cNvSpPr/>
-          <p:nvPr/>
-        </p:nvSpPr>
-        <p:spPr>
-          <a:xfrm>
             <a:off x="850392" y="2587752"/>
             <a:ext cx="1856232" cy="219456"/>
           </a:xfrm>
@@ -10484,7 +10496,7 @@
       </p:sp>
       <p:sp>
         <p:nvSpPr>
-          <p:cNvPr id="12" name="Shape 10"/>
+          <p:cNvPr id="11" name="Shape 9"/>
           <p:cNvSpPr/>
           <p:nvPr/>
         </p:nvSpPr>
@@ -10518,7 +10530,7 @@
       </p:sp>
       <p:sp>
         <p:nvSpPr>
-          <p:cNvPr id="13" name="Text 11"/>
+          <p:cNvPr id="12" name="Text 10"/>
           <p:cNvSpPr/>
           <p:nvPr/>
         </p:nvSpPr>
@@ -10559,46 +10571,7 @@
       </p:sp>
       <p:sp>
         <p:nvSpPr>
-          <p:cNvPr id="14" name="Text 12"/>
-          <p:cNvSpPr/>
-          <p:nvPr/>
-        </p:nvSpPr>
-        <p:spPr>
-          <a:xfrm>
-            <a:off x="4992624" y="2185416"/>
-            <a:ext cx="411480" cy="182880"/>
-          </a:xfrm>
-          <a:prstGeom prst="rect">
-            <a:avLst/>
-          </a:prstGeom>
-          <a:noFill/>
-          <a:ln/>
-        </p:spPr>
-        <p:txBody>
-          <a:bodyPr wrap="square" lIns="0" tIns="0" rIns="0" bIns="0" rtlCol="0" anchor="ctr"/>
-          <a:lstStyle/>
-          <a:p>
-            <a:pPr indent="0" marL="0">
-              <a:buNone/>
-            </a:pPr>
-            <a:r>
-              <a:rPr lang="en-US" sz="1100" dirty="0">
-                <a:solidFill>
-                  <a:srgbClr val="78919A"/>
-                </a:solidFill>
-                <a:latin typeface="Noto Sans CJK SC" pitchFamily="34" charset="0"/>
-                <a:ea typeface="Noto Sans CJK SC" pitchFamily="34" charset="-122"/>
-                <a:cs typeface="Noto Sans CJK SC" pitchFamily="34" charset="-120"/>
-              </a:rPr>
-              <a:t>个</a:t>
-            </a:r>
-            <a:endParaRPr lang="en-US" sz="1100" dirty="0"/>
-          </a:p>
-        </p:txBody>
-      </p:sp>
-      <p:sp>
-        <p:nvSpPr>
-          <p:cNvPr id="15" name="Text 13"/>
+          <p:cNvPr id="13" name="Text 11"/>
           <p:cNvSpPr/>
           <p:nvPr/>
         </p:nvSpPr>
@@ -10639,7 +10612,7 @@
       </p:sp>
       <p:sp>
         <p:nvSpPr>
-          <p:cNvPr id="16" name="Shape 14"/>
+          <p:cNvPr id="14" name="Shape 12"/>
           <p:cNvSpPr/>
           <p:nvPr/>
         </p:nvSpPr>
@@ -10673,7 +10646,7 @@
       </p:sp>
       <p:sp>
         <p:nvSpPr>
-          <p:cNvPr id="17" name="Text 15"/>
+          <p:cNvPr id="15" name="Text 13"/>
           <p:cNvSpPr/>
           <p:nvPr/>
         </p:nvSpPr>
@@ -10714,46 +10687,7 @@
       </p:sp>
       <p:sp>
         <p:nvSpPr>
-          <p:cNvPr id="18" name="Text 16"/>
-          <p:cNvSpPr/>
-          <p:nvPr/>
-        </p:nvSpPr>
-        <p:spPr>
-          <a:xfrm>
-            <a:off x="7763256" y="2185416"/>
-            <a:ext cx="411480" cy="182880"/>
-          </a:xfrm>
-          <a:prstGeom prst="rect">
-            <a:avLst/>
-          </a:prstGeom>
-          <a:noFill/>
-          <a:ln/>
-        </p:spPr>
-        <p:txBody>
-          <a:bodyPr wrap="square" lIns="0" tIns="0" rIns="0" bIns="0" rtlCol="0" anchor="ctr"/>
-          <a:lstStyle/>
-          <a:p>
-            <a:pPr indent="0" marL="0">
-              <a:buNone/>
-            </a:pPr>
-            <a:r>
-              <a:rPr lang="en-US" sz="1100" dirty="0">
-                <a:solidFill>
-                  <a:srgbClr val="78919A"/>
-                </a:solidFill>
-                <a:latin typeface="Noto Sans CJK SC" pitchFamily="34" charset="0"/>
-                <a:ea typeface="Noto Sans CJK SC" pitchFamily="34" charset="-122"/>
-                <a:cs typeface="Noto Sans CJK SC" pitchFamily="34" charset="-120"/>
-              </a:rPr>
-              <a:t>个</a:t>
-            </a:r>
-            <a:endParaRPr lang="en-US" sz="1100" dirty="0"/>
-          </a:p>
-        </p:txBody>
-      </p:sp>
-      <p:sp>
-        <p:nvSpPr>
-          <p:cNvPr id="19" name="Text 17"/>
+          <p:cNvPr id="16" name="Text 14"/>
           <p:cNvSpPr/>
           <p:nvPr/>
         </p:nvSpPr>
@@ -10794,7 +10728,7 @@
       </p:sp>
       <p:sp>
         <p:nvSpPr>
-          <p:cNvPr id="20" name="Shape 18"/>
+          <p:cNvPr id="17" name="Shape 15"/>
           <p:cNvSpPr/>
           <p:nvPr/>
         </p:nvSpPr>
@@ -10828,7 +10762,7 @@
       </p:sp>
       <p:sp>
         <p:nvSpPr>
-          <p:cNvPr id="21" name="Text 19"/>
+          <p:cNvPr id="18" name="Text 16"/>
           <p:cNvSpPr/>
           <p:nvPr/>
         </p:nvSpPr>
@@ -10869,46 +10803,7 @@
       </p:sp>
       <p:sp>
         <p:nvSpPr>
-          <p:cNvPr id="22" name="Text 20"/>
-          <p:cNvSpPr/>
-          <p:nvPr/>
-        </p:nvSpPr>
-        <p:spPr>
-          <a:xfrm>
-            <a:off x="10533888" y="2185416"/>
-            <a:ext cx="411480" cy="182880"/>
-          </a:xfrm>
-          <a:prstGeom prst="rect">
-            <a:avLst/>
-          </a:prstGeom>
-          <a:noFill/>
-          <a:ln/>
-        </p:spPr>
-        <p:txBody>
-          <a:bodyPr wrap="square" lIns="0" tIns="0" rIns="0" bIns="0" rtlCol="0" anchor="ctr"/>
-          <a:lstStyle/>
-          <a:p>
-            <a:pPr indent="0" marL="0">
-              <a:buNone/>
-            </a:pPr>
-            <a:r>
-              <a:rPr lang="en-US" sz="1100" dirty="0">
-                <a:solidFill>
-                  <a:srgbClr val="78919A"/>
-                </a:solidFill>
-                <a:latin typeface="Noto Sans CJK SC" pitchFamily="34" charset="0"/>
-                <a:ea typeface="Noto Sans CJK SC" pitchFamily="34" charset="-122"/>
-                <a:cs typeface="Noto Sans CJK SC" pitchFamily="34" charset="-120"/>
-              </a:rPr>
-              <a:t>份</a:t>
-            </a:r>
-            <a:endParaRPr lang="en-US" sz="1100" dirty="0"/>
-          </a:p>
-        </p:txBody>
-      </p:sp>
-      <p:sp>
-        <p:nvSpPr>
-          <p:cNvPr id="23" name="Text 21"/>
+          <p:cNvPr id="19" name="Text 17"/>
           <p:cNvSpPr/>
           <p:nvPr/>
         </p:nvSpPr>
@@ -10949,7 +10844,7 @@
       </p:sp>
       <p:sp>
         <p:nvSpPr>
-          <p:cNvPr id="24" name="Shape 22"/>
+          <p:cNvPr id="20" name="Shape 18"/>
           <p:cNvSpPr/>
           <p:nvPr/>
         </p:nvSpPr>
@@ -10983,7 +10878,7 @@
       </p:sp>
       <p:sp>
         <p:nvSpPr>
-          <p:cNvPr id="25" name="Text 23"/>
+          <p:cNvPr id="21" name="Text 19"/>
           <p:cNvSpPr/>
           <p:nvPr/>
         </p:nvSpPr>
@@ -11022,7 +10917,7 @@
       </p:sp>
       <p:sp>
         <p:nvSpPr>
-          <p:cNvPr id="26" name="Text 24"/>
+          <p:cNvPr id="22" name="Text 20"/>
           <p:cNvSpPr/>
           <p:nvPr/>
         </p:nvSpPr>
@@ -11061,7 +10956,7 @@
       </p:sp>
       <p:sp>
         <p:nvSpPr>
-          <p:cNvPr id="27" name="Shape 25"/>
+          <p:cNvPr id="23" name="Shape 21"/>
           <p:cNvSpPr/>
           <p:nvPr/>
         </p:nvSpPr>
@@ -11088,7 +10983,7 @@
       </p:sp>
       <p:sp>
         <p:nvSpPr>
-          <p:cNvPr id="28" name="Shape 26"/>
+          <p:cNvPr id="24" name="Shape 22"/>
           <p:cNvSpPr/>
           <p:nvPr/>
         </p:nvSpPr>
@@ -11115,7 +11010,7 @@
       </p:sp>
       <p:sp>
         <p:nvSpPr>
-          <p:cNvPr id="29" name="Text 27"/>
+          <p:cNvPr id="25" name="Text 23"/>
           <p:cNvSpPr/>
           <p:nvPr/>
         </p:nvSpPr>
@@ -11154,7 +11049,7 @@
       </p:sp>
       <p:sp>
         <p:nvSpPr>
-          <p:cNvPr id="30" name="Text 28"/>
+          <p:cNvPr id="26" name="Text 24"/>
           <p:cNvSpPr/>
           <p:nvPr/>
         </p:nvSpPr>
@@ -11193,7 +11088,7 @@
       </p:sp>
       <p:sp>
         <p:nvSpPr>
-          <p:cNvPr id="31" name="Shape 29"/>
+          <p:cNvPr id="27" name="Shape 25"/>
           <p:cNvSpPr/>
           <p:nvPr/>
         </p:nvSpPr>
@@ -11220,7 +11115,7 @@
       </p:sp>
       <p:sp>
         <p:nvSpPr>
-          <p:cNvPr id="32" name="Shape 30"/>
+          <p:cNvPr id="28" name="Shape 26"/>
           <p:cNvSpPr/>
           <p:nvPr/>
         </p:nvSpPr>
@@ -11247,7 +11142,7 @@
       </p:sp>
       <p:sp>
         <p:nvSpPr>
-          <p:cNvPr id="33" name="Text 31"/>
+          <p:cNvPr id="29" name="Text 27"/>
           <p:cNvSpPr/>
           <p:nvPr/>
         </p:nvSpPr>
@@ -11286,7 +11181,7 @@
       </p:sp>
       <p:sp>
         <p:nvSpPr>
-          <p:cNvPr id="34" name="Text 32"/>
+          <p:cNvPr id="30" name="Text 28"/>
           <p:cNvSpPr/>
           <p:nvPr/>
         </p:nvSpPr>
@@ -11325,7 +11220,7 @@
       </p:sp>
       <p:sp>
         <p:nvSpPr>
-          <p:cNvPr id="35" name="Shape 33"/>
+          <p:cNvPr id="31" name="Shape 29"/>
           <p:cNvSpPr/>
           <p:nvPr/>
         </p:nvSpPr>
@@ -11352,7 +11247,7 @@
       </p:sp>
       <p:sp>
         <p:nvSpPr>
-          <p:cNvPr id="36" name="Shape 34"/>
+          <p:cNvPr id="32" name="Shape 30"/>
           <p:cNvSpPr/>
           <p:nvPr/>
         </p:nvSpPr>
@@ -11379,7 +11274,7 @@
       </p:sp>
       <p:sp>
         <p:nvSpPr>
-          <p:cNvPr id="37" name="Text 35"/>
+          <p:cNvPr id="33" name="Text 31"/>
           <p:cNvSpPr/>
           <p:nvPr/>
         </p:nvSpPr>
@@ -11418,7 +11313,7 @@
       </p:sp>
       <p:sp>
         <p:nvSpPr>
-          <p:cNvPr id="38" name="Shape 36"/>
+          <p:cNvPr id="34" name="Shape 32"/>
           <p:cNvSpPr/>
           <p:nvPr/>
         </p:nvSpPr>
@@ -11445,7 +11340,7 @@
       </p:sp>
       <p:sp>
         <p:nvSpPr>
-          <p:cNvPr id="39" name="Text 37"/>
+          <p:cNvPr id="35" name="Text 33"/>
           <p:cNvSpPr/>
           <p:nvPr/>
         </p:nvSpPr>
@@ -11484,7 +11379,7 @@
       </p:sp>
       <p:sp>
         <p:nvSpPr>
-          <p:cNvPr id="40" name="Text 38"/>
+          <p:cNvPr id="36" name="Text 34"/>
           <p:cNvSpPr/>
           <p:nvPr/>
         </p:nvSpPr>
@@ -14707,7 +14602,7 @@
         </p:nvSpPr>
         <p:spPr>
           <a:xfrm>
-            <a:off x="4498848" y="4096512"/>
+            <a:off x="4754880" y="4096512"/>
             <a:ext cx="1024128" cy="1024128"/>
           </a:xfrm>
           <a:prstGeom prst="ellipse">
@@ -14734,7 +14629,7 @@
         </p:nvSpPr>
         <p:spPr>
           <a:xfrm>
-            <a:off x="4544568" y="4383268"/>
+            <a:off x="4800600" y="4383268"/>
             <a:ext cx="932688" cy="450616"/>
           </a:xfrm>
           <a:prstGeom prst="rect">
@@ -15126,7 +15021,7 @@
                 <a:ea typeface="Noto Sans CJK SC" pitchFamily="34" charset="-122"/>
                 <a:cs typeface="Noto Sans CJK SC" pitchFamily="34" charset="-120"/>
               </a:rPr>
-              <a:t>Nacos、Redis、MySQL、AI API 与 COS 均需配置</a:t>
+              <a:t>Nacos、Redis、MySQL、AI 模型与 COS 均需配置</a:t>
             </a:r>
             <a:endParaRPr lang="en-US" sz="1220" dirty="0"/>
           </a:p>
@@ -15231,7 +15126,7 @@
                 <a:ea typeface="Noto Sans CJK SC" pitchFamily="34" charset="-122"/>
                 <a:cs typeface="Noto Sans CJK SC" pitchFamily="34" charset="-120"/>
               </a:rPr>
-              <a:t>截图链路依赖 Chrome / Selenium 运行环境</a:t>
+              <a:t>截图依赖 Chrome / Selenium</a:t>
             </a:r>
             <a:endParaRPr lang="en-US" sz="1220" dirty="0"/>
           </a:p>
@@ -15441,7 +15336,7 @@
                 <a:ea typeface="Noto Sans CJK SC" pitchFamily="34" charset="-122"/>
                 <a:cs typeface="Noto Sans CJK SC" pitchFamily="34" charset="-120"/>
               </a:rPr>
-              <a:t>LangGraph4j 仍采用 1.6.0-rc2</a:t>
+              <a:t>LangGraph4j 仍为 1.6.0-rc2</a:t>
             </a:r>
             <a:endParaRPr lang="en-US" sz="1220" dirty="0"/>
           </a:p>

--- a/docs/reports/project-status-2026-07-20.pptx
+++ b/docs/reports/project-status-2026-07-20.pptx
@@ -15021,7 +15021,7 @@
                 <a:ea typeface="Noto Sans CJK SC" pitchFamily="34" charset="-122"/>
                 <a:cs typeface="Noto Sans CJK SC" pitchFamily="34" charset="-120"/>
               </a:rPr>
-              <a:t>Nacos、Redis、MySQL、AI 模型与 COS 均需配置</a:t>
+              <a:t>注册中心、缓存、数据库、模型服务与 COS 均需配置</a:t>
             </a:r>
             <a:endParaRPr lang="en-US" sz="1220" dirty="0"/>
           </a:p>
